--- a/neerlandais1/powerpoints/Dubbele_infinitief_Le_double_infinitif.pptx
+++ b/neerlandais1/powerpoints/Dubbele_infinitief_Le_double_infinitif.pptx
@@ -137,12 +137,12 @@
   <p:extLst>
     <p:ext uri="{521415D9-36F7-43E2-AB2F-B90AF26B5E84}">
       <p14:sectionLst xmlns:p14="http://schemas.microsoft.com/office/powerpoint/2010/main">
-        <p14:section name="Ouverture" id="{a5e67c1d-520a-13f1-25eb-ff5c2d56c032}">
+        <p14:section name="Ouverture" id="{53ed711d-c786-2a2c-bdf1-f24a4b891dd9}">
           <p14:sldIdLst>
             <p14:sldId id="256"/>
           </p14:sldIdLst>
         </p14:section>
-        <p14:section name="Découvrir" id="{7b98a6dd-7ef8-8608-9a37-246267277556}">
+        <p14:section name="Découvrir" id="{ce026328-d8e1-226f-fc6f-8a5324f5be63}">
           <p14:sldIdLst>
             <p14:sldId id="257"/>
             <p14:sldId id="258"/>
@@ -151,7 +151,7 @@
             <p14:sldId id="261"/>
           </p14:sldIdLst>
         </p14:section>
-        <p14:section name="Les cinq familles" id="{10e55c61-931f-7c80-9413-176b3436ecf8}">
+        <p14:section name="Les cinq familles" id="{46b4fe6a-a40a-3e09-033f-21c22800d5a2}">
           <p14:sldIdLst>
             <p14:sldId id="262"/>
             <p14:sldId id="263"/>
@@ -160,7 +160,7 @@
             <p14:sldId id="266"/>
           </p14:sldIdLst>
         </p14:section>
-        <p14:section name="Les pièges" id="{5cc52c17-ff14-c170-22a0-b8a6c1fe2946}">
+        <p14:section name="Les pièges" id="{e23c831b-d475-2638-87f5-eb9d7ad9a0d5}">
           <p14:sldIdLst>
             <p14:sldId id="267"/>
             <p14:sldId id="268"/>
@@ -170,7 +170,7 @@
             <p14:sldId id="272"/>
           </p14:sldIdLst>
         </p14:section>
-        <p14:section name="JIJ NU ! — Oefeningen" id="{c8e1cefa-59e2-cdfc-29de-5758548166da}">
+        <p14:section name="JIJ NU ! — Oefeningen" id="{04e57b6c-5cd9-e384-e4a0-6b28465ffd29}">
           <p14:sldIdLst>
             <p14:sldId id="273"/>
             <p14:sldId id="274"/>
@@ -187,7 +187,7 @@
             <p14:sldId id="285"/>
           </p14:sldIdLst>
         </p14:section>
-        <p14:section name="Clôture" id="{58dcd53e-6a62-6118-192b-8344e0638976}">
+        <p14:section name="Clôture" id="{07f82c8c-220f-c021-d070-142b71d5a244}">
           <p14:sldIdLst>
             <p14:sldId id="286"/>
           </p14:sldIdLst>

--- a/neerlandais1/powerpoints/Dubbele_infinitief_Le_double_infinitif.pptx
+++ b/neerlandais1/powerpoints/Dubbele_infinitief_Le_double_infinitif.pptx
@@ -137,12 +137,12 @@
   <p:extLst>
     <p:ext uri="{521415D9-36F7-43E2-AB2F-B90AF26B5E84}">
       <p14:sectionLst xmlns:p14="http://schemas.microsoft.com/office/powerpoint/2010/main">
-        <p14:section name="Ouverture" id="{53ed711d-c786-2a2c-bdf1-f24a4b891dd9}">
+        <p14:section name="Ouverture" id="{ab11bbf9-b629-435e-8816-563c4eb40882}">
           <p14:sldIdLst>
             <p14:sldId id="256"/>
           </p14:sldIdLst>
         </p14:section>
-        <p14:section name="Découvrir" id="{ce026328-d8e1-226f-fc6f-8a5324f5be63}">
+        <p14:section name="Découvrir" id="{c9247aba-a2fd-3479-301f-d896da3902ba}">
           <p14:sldIdLst>
             <p14:sldId id="257"/>
             <p14:sldId id="258"/>
@@ -151,7 +151,7 @@
             <p14:sldId id="261"/>
           </p14:sldIdLst>
         </p14:section>
-        <p14:section name="Les cinq familles" id="{46b4fe6a-a40a-3e09-033f-21c22800d5a2}">
+        <p14:section name="Les cinq familles" id="{caa55a61-1114-2a35-0c74-9e63e8c882ae}">
           <p14:sldIdLst>
             <p14:sldId id="262"/>
             <p14:sldId id="263"/>
@@ -160,7 +160,7 @@
             <p14:sldId id="266"/>
           </p14:sldIdLst>
         </p14:section>
-        <p14:section name="Les pièges" id="{e23c831b-d475-2638-87f5-eb9d7ad9a0d5}">
+        <p14:section name="Les pièges" id="{ef78c885-bfb5-1a18-6e9c-0a90e83a35b5}">
           <p14:sldIdLst>
             <p14:sldId id="267"/>
             <p14:sldId id="268"/>
@@ -170,7 +170,7 @@
             <p14:sldId id="272"/>
           </p14:sldIdLst>
         </p14:section>
-        <p14:section name="JIJ NU ! — Oefeningen" id="{04e57b6c-5cd9-e384-e4a0-6b28465ffd29}">
+        <p14:section name="JIJ NU ! — Oefeningen" id="{c8b9e85e-fbeb-3d98-39a2-c5e9fb32b88b}">
           <p14:sldIdLst>
             <p14:sldId id="273"/>
             <p14:sldId id="274"/>
@@ -187,7 +187,7 @@
             <p14:sldId id="285"/>
           </p14:sldIdLst>
         </p14:section>
-        <p14:section name="Clôture" id="{07f82c8c-220f-c021-d070-142b71d5a244}">
+        <p14:section name="Clôture" id="{afb96d64-3bdd-7d37-5e50-4276d18e2839}">
           <p14:sldIdLst>
             <p14:sldId id="286"/>
           </p14:sldIdLst>

--- a/neerlandais1/powerpoints/Dubbele_infinitief_Le_double_infinitif.pptx
+++ b/neerlandais1/powerpoints/Dubbele_infinitief_Le_double_infinitif.pptx
@@ -137,12 +137,12 @@
   <p:extLst>
     <p:ext uri="{521415D9-36F7-43E2-AB2F-B90AF26B5E84}">
       <p14:sectionLst xmlns:p14="http://schemas.microsoft.com/office/powerpoint/2010/main">
-        <p14:section name="Ouverture" id="{ab11bbf9-b629-435e-8816-563c4eb40882}">
+        <p14:section name="Ouverture" id="{d95a81af-3792-8e50-8fa7-e35f96ad2b24}">
           <p14:sldIdLst>
             <p14:sldId id="256"/>
           </p14:sldIdLst>
         </p14:section>
-        <p14:section name="Découvrir" id="{c9247aba-a2fd-3479-301f-d896da3902ba}">
+        <p14:section name="Découvrir" id="{eb28f0e7-2b40-8fcc-d23e-8e86c6b4b303}">
           <p14:sldIdLst>
             <p14:sldId id="257"/>
             <p14:sldId id="258"/>
@@ -151,7 +151,7 @@
             <p14:sldId id="261"/>
           </p14:sldIdLst>
         </p14:section>
-        <p14:section name="Les cinq familles" id="{caa55a61-1114-2a35-0c74-9e63e8c882ae}">
+        <p14:section name="Les cinq familles" id="{7f2454d6-deec-4328-94fb-4252f3b4e7ac}">
           <p14:sldIdLst>
             <p14:sldId id="262"/>
             <p14:sldId id="263"/>
@@ -160,7 +160,7 @@
             <p14:sldId id="266"/>
           </p14:sldIdLst>
         </p14:section>
-        <p14:section name="Les pièges" id="{ef78c885-bfb5-1a18-6e9c-0a90e83a35b5}">
+        <p14:section name="Les pièges" id="{726058eb-7fb8-c616-2976-6ad767bd5383}">
           <p14:sldIdLst>
             <p14:sldId id="267"/>
             <p14:sldId id="268"/>
@@ -170,7 +170,7 @@
             <p14:sldId id="272"/>
           </p14:sldIdLst>
         </p14:section>
-        <p14:section name="JIJ NU ! — Oefeningen" id="{c8b9e85e-fbeb-3d98-39a2-c5e9fb32b88b}">
+        <p14:section name="JIJ NU ! — Oefeningen" id="{f30b428e-90cd-22e6-ab9e-4e415c7c6ed6}">
           <p14:sldIdLst>
             <p14:sldId id="273"/>
             <p14:sldId id="274"/>
@@ -187,7 +187,7 @@
             <p14:sldId id="285"/>
           </p14:sldIdLst>
         </p14:section>
-        <p14:section name="Clôture" id="{afb96d64-3bdd-7d37-5e50-4276d18e2839}">
+        <p14:section name="Clôture" id="{42054f32-af65-64ac-9e95-06d9a50fb288}">
           <p14:sldIdLst>
             <p14:sldId id="286"/>
           </p14:sldIdLst>

--- a/neerlandais1/powerpoints/Dubbele_infinitief_Le_double_infinitif.pptx
+++ b/neerlandais1/powerpoints/Dubbele_infinitief_Le_double_infinitif.pptx
@@ -137,12 +137,12 @@
   <p:extLst>
     <p:ext uri="{521415D9-36F7-43E2-AB2F-B90AF26B5E84}">
       <p14:sectionLst xmlns:p14="http://schemas.microsoft.com/office/powerpoint/2010/main">
-        <p14:section name="Ouverture" id="{d95a81af-3792-8e50-8fa7-e35f96ad2b24}">
+        <p14:section name="Ouverture" id="{14243cc5-3a52-6010-6a2e-8100bf935679}">
           <p14:sldIdLst>
             <p14:sldId id="256"/>
           </p14:sldIdLst>
         </p14:section>
-        <p14:section name="Découvrir" id="{eb28f0e7-2b40-8fcc-d23e-8e86c6b4b303}">
+        <p14:section name="Découvrir" id="{150d0887-71f8-cc74-f091-a1bf57874634}">
           <p14:sldIdLst>
             <p14:sldId id="257"/>
             <p14:sldId id="258"/>
@@ -151,7 +151,7 @@
             <p14:sldId id="261"/>
           </p14:sldIdLst>
         </p14:section>
-        <p14:section name="Les cinq familles" id="{7f2454d6-deec-4328-94fb-4252f3b4e7ac}">
+        <p14:section name="Les cinq familles" id="{b7aedb0a-da03-e3e4-42d5-64d3d33faf99}">
           <p14:sldIdLst>
             <p14:sldId id="262"/>
             <p14:sldId id="263"/>
@@ -160,7 +160,7 @@
             <p14:sldId id="266"/>
           </p14:sldIdLst>
         </p14:section>
-        <p14:section name="Les pièges" id="{726058eb-7fb8-c616-2976-6ad767bd5383}">
+        <p14:section name="Les pièges" id="{324883e3-2a8c-ef3b-2293-34f26d59edf5}">
           <p14:sldIdLst>
             <p14:sldId id="267"/>
             <p14:sldId id="268"/>
@@ -170,7 +170,7 @@
             <p14:sldId id="272"/>
           </p14:sldIdLst>
         </p14:section>
-        <p14:section name="JIJ NU ! — Oefeningen" id="{f30b428e-90cd-22e6-ab9e-4e415c7c6ed6}">
+        <p14:section name="JIJ NU ! — Oefeningen" id="{150558b5-bf3a-6e65-b5be-2c95c79fe996}">
           <p14:sldIdLst>
             <p14:sldId id="273"/>
             <p14:sldId id="274"/>
@@ -187,7 +187,7 @@
             <p14:sldId id="285"/>
           </p14:sldIdLst>
         </p14:section>
-        <p14:section name="Clôture" id="{42054f32-af65-64ac-9e95-06d9a50fb288}">
+        <p14:section name="Clôture" id="{a832756d-19bc-79f1-86f2-df23cc4f5e9a}">
           <p14:sldIdLst>
             <p14:sldId id="286"/>
           </p14:sldIdLst>
